--- a/docs/overview.pptx
+++ b/docs/overview.pptx
@@ -4640,7 +4640,7 @@
                 </a:solidFill>
                 <a:latin typeface="Calibri"/>
               </a:rPr>
-              <a:t>Three composer paths  (one prompt, three lanes)</a:t>
+              <a:t>Deterministic classification</a:t>
             </a:r>
           </a:p>
           <a:p>
@@ -4650,22 +4650,13 @@
               </a:spcAft>
             </a:pPr>
             <a:r>
-              <a:rPr sz="1000" b="1" i="0">
-                <a:solidFill>
-                  <a:srgbClr val="142647"/>
-                </a:solidFill>
-                <a:latin typeface="Calibri"/>
-              </a:rPr>
-              <a:t>• Scenario match</a:t>
-            </a:r>
-            <a:r>
               <a:rPr sz="1000" b="0" i="0">
                 <a:solidFill>
                   <a:srgbClr val="233555"/>
                 </a:solidFill>
                 <a:latin typeface="Calibri"/>
               </a:rPr>
-              <a:t> — Scenario + Ontology + Resolver  (chip path)</a:t>
+              <a:t>• LLM picks from the closed set of authored scenarios only</a:t>
             </a:r>
           </a:p>
           <a:p>
@@ -4675,22 +4666,13 @@
               </a:spcAft>
             </a:pPr>
             <a:r>
-              <a:rPr sz="1000" b="1" i="0">
-                <a:solidFill>
-                  <a:srgbClr val="142647"/>
-                </a:solidFill>
-                <a:latin typeface="Calibri"/>
-              </a:rPr>
-              <a:t>• Ontology lookup</a:t>
-            </a:r>
-            <a:r>
               <a:rPr sz="1000" b="0" i="0">
                 <a:solidFill>
                   <a:srgbClr val="233555"/>
                 </a:solidFill>
                 <a:latin typeface="Calibri"/>
               </a:rPr>
-              <a:t> — Ontology + Resolver only  (no scenario; opt-in fallback)</a:t>
+              <a:t>• No match → case is refused; operator picks a chip explicitly</a:t>
             </a:r>
           </a:p>
           <a:p>
@@ -4700,22 +4682,13 @@
               </a:spcAft>
             </a:pPr>
             <a:r>
-              <a:rPr sz="1000" b="1" i="0">
-                <a:solidFill>
-                  <a:srgbClr val="142647"/>
-                </a:solidFill>
-                <a:latin typeface="Calibri"/>
-              </a:rPr>
-              <a:t>• NL write action</a:t>
-            </a:r>
-            <a:r>
               <a:rPr sz="1000" b="0" i="0">
                 <a:solidFill>
                   <a:srgbClr val="233555"/>
                 </a:solidFill>
                 <a:latin typeface="Calibri"/>
               </a:rPr>
-              <a:t> — Action + executor + HITL  (no scenario; opt-in fallback)</a:t>
+              <a:t>• Write actions run only via hand-authored `_executor` blocks (no NL invention)</a:t>
             </a:r>
           </a:p>
         </p:txBody>
